--- a/docs/private/ВДС-УГОК-презентация-2026-10.pptx
+++ b/docs/private/ВДС-УГОК-презентация-2026-10.pptx
@@ -3147,22 +3147,22 @@
       </p:sp>
       <p:pic>
         <p:nvPicPr>
-          <p:cNvPr id="3" name="Picture 2" descr="net_wide.png"/>
+          <p:cNvPr id="9" name="Picture 8" descr="net_tall_nocb.png"/>
           <p:cNvPicPr>
             <a:picLocks noChangeAspect="1"/>
           </p:cNvPicPr>
           <p:nvPr/>
         </p:nvPicPr>
         <p:blipFill>
-          <a:blip r:embed="rId2"/>
+          <a:blip r:embed="rId3"/>
           <a:stretch>
             <a:fillRect/>
           </a:stretch>
         </p:blipFill>
         <p:spPr>
           <a:xfrm>
-            <a:off x="1417320" y="3017520"/>
-            <a:ext cx="9326880" cy="3606121"/>
+            <a:off x="9544748" y="228600"/>
+            <a:ext cx="2189747" cy="6400800"/>
           </a:xfrm>
           <a:prstGeom prst="rect">
             <a:avLst/>
@@ -3221,8 +3221,8 @@
         </p:nvSpPr>
         <p:spPr>
           <a:xfrm>
-            <a:off x="640080" y="548640"/>
-            <a:ext cx="10972800" cy="365760"/>
+            <a:off x="640080" y="822960"/>
+            <a:ext cx="8778240" cy="365760"/>
           </a:xfrm>
           <a:prstGeom prst="rect">
             <a:avLst/>
@@ -3260,8 +3260,8 @@
         </p:nvSpPr>
         <p:spPr>
           <a:xfrm>
-            <a:off x="640080" y="1005840"/>
-            <a:ext cx="10972800" cy="1097280"/>
+            <a:off x="640080" y="2011680"/>
+            <a:ext cx="8778240" cy="1737360"/>
           </a:xfrm>
           <a:prstGeom prst="rect">
             <a:avLst/>
@@ -3300,8 +3300,8 @@
         </p:nvSpPr>
         <p:spPr>
           <a:xfrm>
-            <a:off x="640080" y="2240280"/>
-            <a:ext cx="10972800" cy="457200"/>
+            <a:off x="640080" y="3749039"/>
+            <a:ext cx="8778240" cy="822960"/>
           </a:xfrm>
           <a:prstGeom prst="rect">
             <a:avLst/>
@@ -3339,8 +3339,8 @@
         </p:nvSpPr>
         <p:spPr>
           <a:xfrm>
-            <a:off x="640080" y="2606040"/>
-            <a:ext cx="10972800" cy="457200"/>
+            <a:off x="640080" y="4846320"/>
+            <a:ext cx="8778240" cy="457200"/>
           </a:xfrm>
           <a:prstGeom prst="rect">
             <a:avLst/>
@@ -10675,8 +10675,8 @@
         </p:nvSpPr>
         <p:spPr>
           <a:xfrm>
-            <a:off x="521207" y="1600200"/>
-            <a:ext cx="7589520" cy="4709160"/>
+            <a:off x="521207" y="1554480"/>
+            <a:ext cx="3931920" cy="4800600"/>
           </a:xfrm>
           <a:prstGeom prst="rect">
             <a:avLst/>
@@ -10711,219 +10711,219 @@
           </a:p>
         </p:txBody>
       </p:sp>
+      <p:sp>
+        <p:nvSpPr>
+          <p:cNvPr id="12" name="TextBox 11"/>
+          <p:cNvSpPr txBox="1"/>
+          <p:nvPr/>
+        </p:nvSpPr>
+        <p:spPr>
+          <a:xfrm>
+            <a:off x="4846320" y="1600200"/>
+            <a:ext cx="6858000" cy="365760"/>
+          </a:xfrm>
+          <a:prstGeom prst="rect">
+            <a:avLst/>
+          </a:prstGeom>
+          <a:noFill/>
+        </p:spPr>
+        <p:txBody>
+          <a:bodyPr wrap="square" lIns="45720" rIns="45720" tIns="27432" bIns="27432" anchor="t">
+            <a:spAutoFit/>
+          </a:bodyPr>
+          <a:lstStyle/>
+          <a:p>
+            <a:pPr algn="l">
+              <a:spcAft>
+                <a:spcPts val="400"/>
+              </a:spcAft>
+            </a:pPr>
+            <a:r>
+              <a:rPr sz="1700" b="1">
+                <a:solidFill>
+                  <a:srgbClr val="1F3A5F"/>
+                </a:solidFill>
+                <a:latin typeface="Arial"/>
+              </a:rPr>
+              <a:t>Главное по сети</a:t>
+            </a:r>
+          </a:p>
+        </p:txBody>
+      </p:sp>
+      <p:sp>
+        <p:nvSpPr>
+          <p:cNvPr id="13" name="TextBox 12"/>
+          <p:cNvSpPr txBox="1"/>
+          <p:nvPr/>
+        </p:nvSpPr>
+        <p:spPr>
+          <a:xfrm>
+            <a:off x="4846320" y="2057400"/>
+            <a:ext cx="6858000" cy="4389120"/>
+          </a:xfrm>
+          <a:prstGeom prst="rect">
+            <a:avLst/>
+          </a:prstGeom>
+          <a:noFill/>
+        </p:spPr>
+        <p:txBody>
+          <a:bodyPr wrap="square" lIns="45720" rIns="45720" tIns="27432" bIns="27432" anchor="t">
+            <a:spAutoFit/>
+          </a:bodyPr>
+          <a:lstStyle/>
+          <a:p>
+            <a:pPr algn="l">
+              <a:spcAft>
+                <a:spcPts val="1200"/>
+              </a:spcAft>
+            </a:pPr>
+            <a:r>
+              <a:rPr sz="1600" b="1">
+                <a:solidFill>
+                  <a:srgbClr val="C26A12"/>
+                </a:solidFill>
+                <a:latin typeface="Arial"/>
+              </a:rPr>
+              <a:t>▪ </a:t>
+            </a:r>
+            <a:r>
+              <a:rPr sz="1600" b="1">
+                <a:solidFill>
+                  <a:srgbClr val="222B36"/>
+                </a:solidFill>
+                <a:latin typeface="Arial"/>
+              </a:rPr>
+              <a:t>3 ГВУ:</a:t>
+            </a:r>
+            <a:r>
+              <a:rPr sz="1600" b="0">
+                <a:solidFill>
+                  <a:srgbClr val="222B36"/>
+                </a:solidFill>
+                <a:latin typeface="Arial"/>
+              </a:rPr>
+              <a:t> ВО-30 (ТНС 0–144), ВО-32 (подъездные выработки гор. 180 м), ВОД-40 (канал клетевого ствола, калорифер)</a:t>
+            </a:r>
+          </a:p>
+          <a:p>
+            <a:pPr algn="l">
+              <a:spcAft>
+                <a:spcPts val="1200"/>
+              </a:spcAft>
+            </a:pPr>
+            <a:r>
+              <a:rPr sz="1600" b="1">
+                <a:solidFill>
+                  <a:srgbClr val="C26A12"/>
+                </a:solidFill>
+                <a:latin typeface="Arial"/>
+              </a:rPr>
+              <a:t>▪ </a:t>
+            </a:r>
+            <a:r>
+              <a:rPr sz="1600" b="1">
+                <a:solidFill>
+                  <a:srgbClr val="222B36"/>
+                </a:solidFill>
+                <a:latin typeface="Arial"/>
+              </a:rPr>
+              <a:t>≈577 м³/с</a:t>
+            </a:r>
+            <a:r>
+              <a:rPr sz="1600" b="0">
+                <a:solidFill>
+                  <a:srgbClr val="222B36"/>
+                </a:solidFill>
+                <a:latin typeface="Arial"/>
+              </a:rPr>
+              <a:t> — суммарный расход через рудник по модели</a:t>
+            </a:r>
+          </a:p>
+          <a:p>
+            <a:pPr algn="l">
+              <a:spcAft>
+                <a:spcPts val="1200"/>
+              </a:spcAft>
+            </a:pPr>
+            <a:r>
+              <a:rPr sz="1600" b="1">
+                <a:solidFill>
+                  <a:srgbClr val="C26A12"/>
+                </a:solidFill>
+                <a:latin typeface="Arial"/>
+              </a:rPr>
+              <a:t>▪ </a:t>
+            </a:r>
+            <a:r>
+              <a:rPr sz="1600" b="1">
+                <a:solidFill>
+                  <a:srgbClr val="222B36"/>
+                </a:solidFill>
+                <a:latin typeface="Arial"/>
+              </a:rPr>
+              <a:t>≈35 ВМП</a:t>
+            </a:r>
+            <a:r>
+              <a:rPr sz="1600" b="0">
+                <a:solidFill>
+                  <a:srgbClr val="222B36"/>
+                </a:solidFill>
+                <a:latin typeface="Arial"/>
+              </a:rPr>
+              <a:t> (ВМ-6, ВМ-12, ВМЭВВ-14), часть — «толкачи» в сквозных выработках</a:t>
+            </a:r>
+          </a:p>
+          <a:p>
+            <a:pPr algn="l">
+              <a:spcAft>
+                <a:spcPts val="1200"/>
+              </a:spcAft>
+            </a:pPr>
+            <a:r>
+              <a:rPr sz="1600" b="1">
+                <a:solidFill>
+                  <a:srgbClr val="C26A12"/>
+                </a:solidFill>
+                <a:latin typeface="Arial"/>
+              </a:rPr>
+              <a:t>▪ </a:t>
+            </a:r>
+            <a:r>
+              <a:rPr sz="1600" b="0">
+                <a:solidFill>
+                  <a:srgbClr val="222B36"/>
+                </a:solidFill>
+                <a:latin typeface="Arial"/>
+              </a:rPr>
+              <a:t>Горизонты от гор. 120 м до гор. 1170 м; нижняя часть проветривается через ствол «Скипо-клетевой»</a:t>
+            </a:r>
+          </a:p>
+        </p:txBody>
+      </p:sp>
       <p:pic>
         <p:nvPicPr>
-          <p:cNvPr id="11" name="Picture 10" descr="net_wide.png"/>
+          <p:cNvPr id="14" name="Picture 13" descr="net_tall.png"/>
           <p:cNvPicPr>
             <a:picLocks noChangeAspect="1"/>
           </p:cNvPicPr>
           <p:nvPr/>
         </p:nvPicPr>
         <p:blipFill>
-          <a:blip r:embed="rId2"/>
+          <a:blip r:embed="rId3"/>
           <a:stretch>
             <a:fillRect/>
           </a:stretch>
         </p:blipFill>
         <p:spPr>
           <a:xfrm>
-            <a:off x="566928" y="2240280"/>
-            <a:ext cx="7498079" cy="2899038"/>
+            <a:off x="1382668" y="1627632"/>
+            <a:ext cx="2208998" cy="4663440"/>
           </a:xfrm>
           <a:prstGeom prst="rect">
             <a:avLst/>
           </a:prstGeom>
         </p:spPr>
       </p:pic>
-      <p:sp>
-        <p:nvSpPr>
-          <p:cNvPr id="12" name="TextBox 11"/>
-          <p:cNvSpPr txBox="1"/>
-          <p:nvPr/>
-        </p:nvSpPr>
-        <p:spPr>
-          <a:xfrm>
-            <a:off x="8366760" y="1600200"/>
-            <a:ext cx="3383280" cy="365760"/>
-          </a:xfrm>
-          <a:prstGeom prst="rect">
-            <a:avLst/>
-          </a:prstGeom>
-          <a:noFill/>
-        </p:spPr>
-        <p:txBody>
-          <a:bodyPr wrap="square" lIns="45720" rIns="45720" tIns="27432" bIns="27432" anchor="t">
-            <a:spAutoFit/>
-          </a:bodyPr>
-          <a:lstStyle/>
-          <a:p>
-            <a:pPr algn="l">
-              <a:spcAft>
-                <a:spcPts val="400"/>
-              </a:spcAft>
-            </a:pPr>
-            <a:r>
-              <a:rPr sz="1700" b="1">
-                <a:solidFill>
-                  <a:srgbClr val="1F3A5F"/>
-                </a:solidFill>
-                <a:latin typeface="Arial"/>
-              </a:rPr>
-              <a:t>Главное по сети</a:t>
-            </a:r>
-          </a:p>
-        </p:txBody>
-      </p:sp>
-      <p:sp>
-        <p:nvSpPr>
-          <p:cNvPr id="13" name="TextBox 12"/>
-          <p:cNvSpPr txBox="1"/>
-          <p:nvPr/>
-        </p:nvSpPr>
-        <p:spPr>
-          <a:xfrm>
-            <a:off x="8366760" y="2011680"/>
-            <a:ext cx="3383280" cy="4389120"/>
-          </a:xfrm>
-          <a:prstGeom prst="rect">
-            <a:avLst/>
-          </a:prstGeom>
-          <a:noFill/>
-        </p:spPr>
-        <p:txBody>
-          <a:bodyPr wrap="square" lIns="45720" rIns="45720" tIns="27432" bIns="27432" anchor="t">
-            <a:spAutoFit/>
-          </a:bodyPr>
-          <a:lstStyle/>
-          <a:p>
-            <a:pPr algn="l">
-              <a:spcAft>
-                <a:spcPts val="700"/>
-              </a:spcAft>
-            </a:pPr>
-            <a:r>
-              <a:rPr sz="1350" b="1">
-                <a:solidFill>
-                  <a:srgbClr val="C26A12"/>
-                </a:solidFill>
-                <a:latin typeface="Arial"/>
-              </a:rPr>
-              <a:t>▪ </a:t>
-            </a:r>
-            <a:r>
-              <a:rPr sz="1350" b="1">
-                <a:solidFill>
-                  <a:srgbClr val="222B36"/>
-                </a:solidFill>
-                <a:latin typeface="Arial"/>
-              </a:rPr>
-              <a:t>3 ГВУ:</a:t>
-            </a:r>
-            <a:r>
-              <a:rPr sz="1350" b="0">
-                <a:solidFill>
-                  <a:srgbClr val="222B36"/>
-                </a:solidFill>
-                <a:latin typeface="Arial"/>
-              </a:rPr>
-              <a:t> ВО-30 (ТНС 0–144), ВО-32 (подъездные выработки гор. 180 м), ВОД-40 (канал клетевого ствола, калорифер)</a:t>
-            </a:r>
-          </a:p>
-          <a:p>
-            <a:pPr algn="l">
-              <a:spcAft>
-                <a:spcPts val="700"/>
-              </a:spcAft>
-            </a:pPr>
-            <a:r>
-              <a:rPr sz="1350" b="1">
-                <a:solidFill>
-                  <a:srgbClr val="C26A12"/>
-                </a:solidFill>
-                <a:latin typeface="Arial"/>
-              </a:rPr>
-              <a:t>▪ </a:t>
-            </a:r>
-            <a:r>
-              <a:rPr sz="1350" b="1">
-                <a:solidFill>
-                  <a:srgbClr val="222B36"/>
-                </a:solidFill>
-                <a:latin typeface="Arial"/>
-              </a:rPr>
-              <a:t>≈577 м³/с</a:t>
-            </a:r>
-            <a:r>
-              <a:rPr sz="1350" b="0">
-                <a:solidFill>
-                  <a:srgbClr val="222B36"/>
-                </a:solidFill>
-                <a:latin typeface="Arial"/>
-              </a:rPr>
-              <a:t> — суммарный расход через рудник по модели</a:t>
-            </a:r>
-          </a:p>
-          <a:p>
-            <a:pPr algn="l">
-              <a:spcAft>
-                <a:spcPts val="700"/>
-              </a:spcAft>
-            </a:pPr>
-            <a:r>
-              <a:rPr sz="1350" b="1">
-                <a:solidFill>
-                  <a:srgbClr val="C26A12"/>
-                </a:solidFill>
-                <a:latin typeface="Arial"/>
-              </a:rPr>
-              <a:t>▪ </a:t>
-            </a:r>
-            <a:r>
-              <a:rPr sz="1350" b="1">
-                <a:solidFill>
-                  <a:srgbClr val="222B36"/>
-                </a:solidFill>
-                <a:latin typeface="Arial"/>
-              </a:rPr>
-              <a:t>≈35 ВМП</a:t>
-            </a:r>
-            <a:r>
-              <a:rPr sz="1350" b="0">
-                <a:solidFill>
-                  <a:srgbClr val="222B36"/>
-                </a:solidFill>
-                <a:latin typeface="Arial"/>
-              </a:rPr>
-              <a:t> (ВМ-6, ВМ-12, ВМЭВВ-14), часть — «толкачи» в сквозных выработках</a:t>
-            </a:r>
-          </a:p>
-          <a:p>
-            <a:pPr algn="l">
-              <a:spcAft>
-                <a:spcPts val="700"/>
-              </a:spcAft>
-            </a:pPr>
-            <a:r>
-              <a:rPr sz="1350" b="1">
-                <a:solidFill>
-                  <a:srgbClr val="C26A12"/>
-                </a:solidFill>
-                <a:latin typeface="Arial"/>
-              </a:rPr>
-              <a:t>▪ </a:t>
-            </a:r>
-            <a:r>
-              <a:rPr sz="1350" b="0">
-                <a:solidFill>
-                  <a:srgbClr val="222B36"/>
-                </a:solidFill>
-                <a:latin typeface="Arial"/>
-              </a:rPr>
-              <a:t>Горизонты от гор. 120 м до гор. 1170 м; нижняя часть проветривается через ствол «Скипо-клетевой»</a:t>
-            </a:r>
-          </a:p>
-        </p:txBody>
-      </p:sp>
     </p:spTree>
   </p:cSld>
   <p:clrMapOvr>
